--- a/inst/templates/widescreen-default.pptx
+++ b/inst/templates/widescreen-default.pptx
@@ -1722,15 +1722,15 @@
         </p:nvSpPr>
         <p:spPr>
           <a:xfrm>
-            <a:off x="365760" y="365760"/>
-            <a:ext cx="11460480" cy="1143000"/>
+            <a:off x="365760" y="274320"/>
+            <a:ext cx="11460480" cy="548640"/>
           </a:xfrm>
           <a:prstGeom prst="rect">
             <a:avLst/>
           </a:prstGeom>
         </p:spPr>
         <p:txBody>
-          <a:bodyPr vert="horz" lIns="91440" tIns="45720" rIns="91440" bIns="45720" rtlCol="0" anchor="ctr">
+          <a:bodyPr vert="horz" lIns="91440" tIns="45720" rIns="91440" bIns="45720" rtlCol="0" anchor="t">
             <a:normAutofit/>
           </a:bodyPr>
           <a:lstStyle/>
@@ -1755,8 +1755,8 @@
         </p:nvSpPr>
         <p:spPr>
           <a:xfrm>
-            <a:off x="365760" y="1554480"/>
-            <a:ext cx="11460480" cy="4572000"/>
+            <a:off x="365760" y="960120"/>
+            <a:ext cx="11460480" cy="5166360"/>
           </a:xfrm>
           <a:prstGeom prst="rect">
             <a:avLst/>
@@ -1943,12 +1943,12 @@
   </p:sldLayoutIdLst>
   <p:txStyles>
     <p:titleStyle>
-      <a:lvl1pPr algn="ctr" defTabSz="914400" rtl="0" eaLnBrk="1" latinLnBrk="0" hangingPunct="1">
+      <a:lvl1pPr algn="l" defTabSz="914400" rtl="0" eaLnBrk="1" latinLnBrk="0" hangingPunct="1">
         <a:spcBef>
           <a:spcPct val="0"/>
         </a:spcBef>
         <a:buNone/>
-        <a:defRPr sz="4400" kern="1200">
+        <a:defRPr sz="2000" kern="1200">
           <a:solidFill>
             <a:schemeClr val="tx1"/>
           </a:solidFill>
